--- a/assets/pptx/catalog-779.pptx
+++ b/assets/pptx/catalog-779.pptx
@@ -3387,7 +3387,7 @@
                 <a:ea typeface="Ebrima"/>
                 <a:cs typeface="Ebrima"/>
               </a:rPr>
-              <a:t>አልረሳም እኔስ አልረሳም (4x)</a:t>
+              <a:t>አልረሳም እኔስ አልረሳም 4x</a:t>
             </a:r>
           </a:p>
           <a:p>
@@ -4087,7 +4087,7 @@
                 <a:ea typeface="Ebrima"/>
                 <a:cs typeface="Ebrima"/>
               </a:rPr>
-              <a:t>ለእኔ የሆንከውን እንዴት ልርሳው (2x)</a:t>
+              <a:t>ለእኔ የሆንከውን እንዴት ልርሳው 2x</a:t>
             </a:r>
           </a:p>
           <a:p>
@@ -4123,7 +4123,7 @@
                 <a:ea typeface="Ebrima"/>
                 <a:cs typeface="Ebrima"/>
               </a:rPr>
-              <a:t>ለእኔ የሆንከውን እንዴት ልርሳው (2x)</a:t>
+              <a:t>ለእኔ የሆንከውን እንዴት ልርሳው 2x</a:t>
             </a:r>
           </a:p>
         </p:txBody>
